--- a/tests/benchmark/architectural_slides/case_024_renovation_journey/output.pptx
+++ b/tests/benchmark/architectural_slides/case_024_renovation_journey/output.pptx
@@ -910,7 +910,7 @@
         <p:spPr>
           <a:xfrm>
             <a:off x="640080" y="411480"/>
-            <a:ext cx="7863840" cy="457200"/>
+            <a:ext cx="7863840" cy="601218"/>
           </a:xfrm>
           <a:prstGeom prst="rect">
             <a:avLst/>
@@ -948,7 +948,7 @@
         </p:nvSpPr>
         <p:spPr>
           <a:xfrm>
-            <a:off x="640080" y="906780"/>
+            <a:off x="640080" y="1050798"/>
             <a:ext cx="7863840" cy="411480"/>
           </a:xfrm>
           <a:prstGeom prst="rect">
@@ -987,8 +987,8 @@
         </p:nvSpPr>
         <p:spPr>
           <a:xfrm>
-            <a:off x="640080" y="1394460"/>
-            <a:ext cx="3874770" cy="1072820"/>
+            <a:off x="640080" y="1538478"/>
+            <a:ext cx="3874770" cy="1016653"/>
           </a:xfrm>
           <a:prstGeom prst="rect">
             <a:avLst/>
@@ -1012,7 +1012,7 @@
         </p:nvSpPr>
         <p:spPr>
           <a:xfrm>
-            <a:off x="777240" y="1747990"/>
+            <a:off x="777240" y="1863924"/>
             <a:ext cx="3600450" cy="365760"/>
           </a:xfrm>
           <a:prstGeom prst="rect">
@@ -1051,8 +1051,8 @@
         </p:nvSpPr>
         <p:spPr>
           <a:xfrm>
-            <a:off x="640080" y="2505380"/>
-            <a:ext cx="3874770" cy="302590"/>
+            <a:off x="640080" y="2593231"/>
+            <a:ext cx="3874770" cy="286748"/>
           </a:xfrm>
           <a:prstGeom prst="rect">
             <a:avLst/>
@@ -1090,8 +1090,8 @@
         </p:nvSpPr>
         <p:spPr>
           <a:xfrm>
-            <a:off x="4629150" y="1394460"/>
-            <a:ext cx="3874770" cy="1072820"/>
+            <a:off x="4629150" y="1538478"/>
+            <a:ext cx="3874770" cy="1016653"/>
           </a:xfrm>
           <a:prstGeom prst="rect">
             <a:avLst/>
@@ -1115,7 +1115,7 @@
         </p:nvSpPr>
         <p:spPr>
           <a:xfrm>
-            <a:off x="4766310" y="1747990"/>
+            <a:off x="4766310" y="1863924"/>
             <a:ext cx="3600450" cy="365760"/>
           </a:xfrm>
           <a:prstGeom prst="rect">
@@ -1154,8 +1154,8 @@
         </p:nvSpPr>
         <p:spPr>
           <a:xfrm>
-            <a:off x="4629150" y="2505380"/>
-            <a:ext cx="3874770" cy="302590"/>
+            <a:off x="4629150" y="2593231"/>
+            <a:ext cx="3874770" cy="286748"/>
           </a:xfrm>
           <a:prstGeom prst="rect">
             <a:avLst/>
@@ -1193,8 +1193,8 @@
         </p:nvSpPr>
         <p:spPr>
           <a:xfrm>
-            <a:off x="640080" y="2922270"/>
-            <a:ext cx="3874770" cy="1072820"/>
+            <a:off x="640080" y="2994279"/>
+            <a:ext cx="3874770" cy="1016653"/>
           </a:xfrm>
           <a:prstGeom prst="rect">
             <a:avLst/>
@@ -1218,7 +1218,7 @@
         </p:nvSpPr>
         <p:spPr>
           <a:xfrm>
-            <a:off x="777240" y="3275800"/>
+            <a:off x="777240" y="3319725"/>
             <a:ext cx="3600450" cy="365760"/>
           </a:xfrm>
           <a:prstGeom prst="rect">
@@ -1257,8 +1257,8 @@
         </p:nvSpPr>
         <p:spPr>
           <a:xfrm>
-            <a:off x="640080" y="4033190"/>
-            <a:ext cx="3874770" cy="302590"/>
+            <a:off x="640080" y="4049032"/>
+            <a:ext cx="3874770" cy="286748"/>
           </a:xfrm>
           <a:prstGeom prst="rect">
             <a:avLst/>
@@ -1296,8 +1296,8 @@
         </p:nvSpPr>
         <p:spPr>
           <a:xfrm>
-            <a:off x="4629150" y="2922270"/>
-            <a:ext cx="3874770" cy="1072820"/>
+            <a:off x="4629150" y="2994279"/>
+            <a:ext cx="3874770" cy="1016653"/>
           </a:xfrm>
           <a:prstGeom prst="rect">
             <a:avLst/>
@@ -1321,7 +1321,7 @@
         </p:nvSpPr>
         <p:spPr>
           <a:xfrm>
-            <a:off x="4766310" y="3275800"/>
+            <a:off x="4766310" y="3319725"/>
             <a:ext cx="3600450" cy="365760"/>
           </a:xfrm>
           <a:prstGeom prst="rect">
@@ -1360,8 +1360,8 @@
         </p:nvSpPr>
         <p:spPr>
           <a:xfrm>
-            <a:off x="4629150" y="4033190"/>
-            <a:ext cx="3874770" cy="302590"/>
+            <a:off x="4629150" y="4049032"/>
+            <a:ext cx="3874770" cy="286748"/>
           </a:xfrm>
           <a:prstGeom prst="rect">
             <a:avLst/>

--- a/tests/benchmark/architectural_slides/case_024_renovation_journey/output.pptx
+++ b/tests/benchmark/architectural_slides/case_024_renovation_journey/output.pptx
@@ -979,73 +979,32 @@
           </a:p>
         </p:txBody>
       </p:sp>
+      <p:pic>
+        <p:nvPicPr>
+          <p:cNvPr id="4" name="Image 0" descr="C:\Users\navib\Desktop\development\Archium-Agent\tests\benchmark\architectural_slides\case_024_renovation_journey\assets\c0240001-0001-4001-8001-000000000001.png">    </p:cNvPr>
+          <p:cNvPicPr>
+            <a:picLocks noChangeAspect="1"/>
+          </p:cNvPicPr>
+          <p:nvPr/>
+        </p:nvPicPr>
+        <p:blipFill>
+          <a:blip r:embed="rId1"/>
+          <a:srcRect l="0" r="0" t="0" b="0"/>
+          <a:stretch/>
+        </p:blipFill>
+        <p:spPr>
+          <a:xfrm>
+            <a:off x="640080" y="1538478"/>
+            <a:ext cx="3874770" cy="1016653"/>
+          </a:xfrm>
+          <a:prstGeom prst="rect">
+            <a:avLst/>
+          </a:prstGeom>
+        </p:spPr>
+      </p:pic>
       <p:sp>
         <p:nvSpPr>
-          <p:cNvPr id="4" name="Shape 2"/>
-          <p:cNvSpPr/>
-          <p:nvPr/>
-        </p:nvSpPr>
-        <p:spPr>
-          <a:xfrm>
-            <a:off x="640080" y="1538478"/>
-            <a:ext cx="3874770" cy="1016653"/>
-          </a:xfrm>
-          <a:prstGeom prst="rect">
-            <a:avLst/>
-          </a:prstGeom>
-          <a:solidFill>
-            <a:srgbClr val="FFFFFF"/>
-          </a:solidFill>
-          <a:ln w="19050">
-            <a:solidFill>
-              <a:srgbClr val="C47B2B"/>
-            </a:solidFill>
-            <a:prstDash val="dash"/>
-          </a:ln>
-        </p:spPr>
-      </p:sp>
-      <p:sp>
-        <p:nvSpPr>
-          <p:cNvPr id="5" name="Text 3"/>
-          <p:cNvSpPr/>
-          <p:nvPr/>
-        </p:nvSpPr>
-        <p:spPr>
-          <a:xfrm>
-            <a:off x="777240" y="1863924"/>
-            <a:ext cx="3600450" cy="365760"/>
-          </a:xfrm>
-          <a:prstGeom prst="rect">
-            <a:avLst/>
-          </a:prstGeom>
-          <a:noFill/>
-          <a:ln/>
-        </p:spPr>
-        <p:txBody>
-          <a:bodyPr wrap="square" rtlCol="0" anchor="ctr"/>
-          <a:lstStyle/>
-          <a:p>
-            <a:pPr algn="ctr" indent="0" marL="0">
-              <a:buNone/>
-            </a:pPr>
-            <a:r>
-              <a:rPr lang="en-US" sz="1200" dirty="0">
-                <a:solidFill>
-                  <a:srgbClr val="777777"/>
-                </a:solidFill>
-                <a:latin typeface="Microsoft YaHei" pitchFamily="34" charset="0"/>
-                <a:ea typeface="Microsoft YaHei" pitchFamily="34" charset="-122"/>
-                <a:cs typeface="Microsoft YaHei" pitchFamily="34" charset="-120"/>
-              </a:rPr>
-              <a:t>素材缺失/路径未解析</a:t>
-            </a:r>
-            <a:endParaRPr lang="en-US" sz="1200" dirty="0"/>
-          </a:p>
-        </p:txBody>
-      </p:sp>
-      <p:sp>
-        <p:nvSpPr>
-          <p:cNvPr id="6" name="Text 4"/>
+          <p:cNvPr id="5" name="Text 2"/>
           <p:cNvSpPr/>
           <p:nvPr/>
         </p:nvSpPr>
@@ -1082,73 +1041,32 @@
           </a:p>
         </p:txBody>
       </p:sp>
+      <p:pic>
+        <p:nvPicPr>
+          <p:cNvPr id="6" name="Image 1" descr="C:\Users\navib\Desktop\development\Archium-Agent\tests\benchmark\architectural_slides\case_024_renovation_journey\assets\c0240002-0001-4001-8001-000000000002.png">    </p:cNvPr>
+          <p:cNvPicPr>
+            <a:picLocks noChangeAspect="1"/>
+          </p:cNvPicPr>
+          <p:nvPr/>
+        </p:nvPicPr>
+        <p:blipFill>
+          <a:blip r:embed="rId2"/>
+          <a:srcRect l="0" r="0" t="0" b="0"/>
+          <a:stretch/>
+        </p:blipFill>
+        <p:spPr>
+          <a:xfrm>
+            <a:off x="4629150" y="1538478"/>
+            <a:ext cx="3874770" cy="1016653"/>
+          </a:xfrm>
+          <a:prstGeom prst="rect">
+            <a:avLst/>
+          </a:prstGeom>
+        </p:spPr>
+      </p:pic>
       <p:sp>
         <p:nvSpPr>
-          <p:cNvPr id="7" name="Shape 5"/>
-          <p:cNvSpPr/>
-          <p:nvPr/>
-        </p:nvSpPr>
-        <p:spPr>
-          <a:xfrm>
-            <a:off x="4629150" y="1538478"/>
-            <a:ext cx="3874770" cy="1016653"/>
-          </a:xfrm>
-          <a:prstGeom prst="rect">
-            <a:avLst/>
-          </a:prstGeom>
-          <a:solidFill>
-            <a:srgbClr val="FFFFFF"/>
-          </a:solidFill>
-          <a:ln w="19050">
-            <a:solidFill>
-              <a:srgbClr val="C47B2B"/>
-            </a:solidFill>
-            <a:prstDash val="dash"/>
-          </a:ln>
-        </p:spPr>
-      </p:sp>
-      <p:sp>
-        <p:nvSpPr>
-          <p:cNvPr id="8" name="Text 6"/>
-          <p:cNvSpPr/>
-          <p:nvPr/>
-        </p:nvSpPr>
-        <p:spPr>
-          <a:xfrm>
-            <a:off x="4766310" y="1863924"/>
-            <a:ext cx="3600450" cy="365760"/>
-          </a:xfrm>
-          <a:prstGeom prst="rect">
-            <a:avLst/>
-          </a:prstGeom>
-          <a:noFill/>
-          <a:ln/>
-        </p:spPr>
-        <p:txBody>
-          <a:bodyPr wrap="square" rtlCol="0" anchor="ctr"/>
-          <a:lstStyle/>
-          <a:p>
-            <a:pPr algn="ctr" indent="0" marL="0">
-              <a:buNone/>
-            </a:pPr>
-            <a:r>
-              <a:rPr lang="en-US" sz="1200" dirty="0">
-                <a:solidFill>
-                  <a:srgbClr val="777777"/>
-                </a:solidFill>
-                <a:latin typeface="Microsoft YaHei" pitchFamily="34" charset="0"/>
-                <a:ea typeface="Microsoft YaHei" pitchFamily="34" charset="-122"/>
-                <a:cs typeface="Microsoft YaHei" pitchFamily="34" charset="-120"/>
-              </a:rPr>
-              <a:t>素材缺失/路径未解析</a:t>
-            </a:r>
-            <a:endParaRPr lang="en-US" sz="1200" dirty="0"/>
-          </a:p>
-        </p:txBody>
-      </p:sp>
-      <p:sp>
-        <p:nvSpPr>
-          <p:cNvPr id="9" name="Text 7"/>
+          <p:cNvPr id="7" name="Text 3"/>
           <p:cNvSpPr/>
           <p:nvPr/>
         </p:nvSpPr>
@@ -1185,73 +1103,32 @@
           </a:p>
         </p:txBody>
       </p:sp>
+      <p:pic>
+        <p:nvPicPr>
+          <p:cNvPr id="8" name="Image 2" descr="C:\Users\navib\Desktop\development\Archium-Agent\tests\benchmark\architectural_slides\case_024_renovation_journey\assets\c0240003-0001-4001-8001-000000000003.png">    </p:cNvPr>
+          <p:cNvPicPr>
+            <a:picLocks noChangeAspect="1"/>
+          </p:cNvPicPr>
+          <p:nvPr/>
+        </p:nvPicPr>
+        <p:blipFill>
+          <a:blip r:embed="rId3"/>
+          <a:srcRect l="0" r="0" t="0" b="0"/>
+          <a:stretch/>
+        </p:blipFill>
+        <p:spPr>
+          <a:xfrm>
+            <a:off x="640080" y="2994279"/>
+            <a:ext cx="3874770" cy="1016653"/>
+          </a:xfrm>
+          <a:prstGeom prst="rect">
+            <a:avLst/>
+          </a:prstGeom>
+        </p:spPr>
+      </p:pic>
       <p:sp>
         <p:nvSpPr>
-          <p:cNvPr id="10" name="Shape 8"/>
-          <p:cNvSpPr/>
-          <p:nvPr/>
-        </p:nvSpPr>
-        <p:spPr>
-          <a:xfrm>
-            <a:off x="640080" y="2994279"/>
-            <a:ext cx="3874770" cy="1016653"/>
-          </a:xfrm>
-          <a:prstGeom prst="rect">
-            <a:avLst/>
-          </a:prstGeom>
-          <a:solidFill>
-            <a:srgbClr val="FFFFFF"/>
-          </a:solidFill>
-          <a:ln w="19050">
-            <a:solidFill>
-              <a:srgbClr val="C47B2B"/>
-            </a:solidFill>
-            <a:prstDash val="dash"/>
-          </a:ln>
-        </p:spPr>
-      </p:sp>
-      <p:sp>
-        <p:nvSpPr>
-          <p:cNvPr id="11" name="Text 9"/>
-          <p:cNvSpPr/>
-          <p:nvPr/>
-        </p:nvSpPr>
-        <p:spPr>
-          <a:xfrm>
-            <a:off x="777240" y="3319725"/>
-            <a:ext cx="3600450" cy="365760"/>
-          </a:xfrm>
-          <a:prstGeom prst="rect">
-            <a:avLst/>
-          </a:prstGeom>
-          <a:noFill/>
-          <a:ln/>
-        </p:spPr>
-        <p:txBody>
-          <a:bodyPr wrap="square" rtlCol="0" anchor="ctr"/>
-          <a:lstStyle/>
-          <a:p>
-            <a:pPr algn="ctr" indent="0" marL="0">
-              <a:buNone/>
-            </a:pPr>
-            <a:r>
-              <a:rPr lang="en-US" sz="1200" dirty="0">
-                <a:solidFill>
-                  <a:srgbClr val="777777"/>
-                </a:solidFill>
-                <a:latin typeface="Microsoft YaHei" pitchFamily="34" charset="0"/>
-                <a:ea typeface="Microsoft YaHei" pitchFamily="34" charset="-122"/>
-                <a:cs typeface="Microsoft YaHei" pitchFamily="34" charset="-120"/>
-              </a:rPr>
-              <a:t>素材缺失/路径未解析</a:t>
-            </a:r>
-            <a:endParaRPr lang="en-US" sz="1200" dirty="0"/>
-          </a:p>
-        </p:txBody>
-      </p:sp>
-      <p:sp>
-        <p:nvSpPr>
-          <p:cNvPr id="12" name="Text 10"/>
+          <p:cNvPr id="9" name="Text 4"/>
           <p:cNvSpPr/>
           <p:nvPr/>
         </p:nvSpPr>
@@ -1288,73 +1165,32 @@
           </a:p>
         </p:txBody>
       </p:sp>
+      <p:pic>
+        <p:nvPicPr>
+          <p:cNvPr id="10" name="Image 3" descr="C:\Users\navib\Desktop\development\Archium-Agent\tests\benchmark\architectural_slides\case_024_renovation_journey\assets\c0240004-0001-4001-8001-000000000004.png">    </p:cNvPr>
+          <p:cNvPicPr>
+            <a:picLocks noChangeAspect="1"/>
+          </p:cNvPicPr>
+          <p:nvPr/>
+        </p:nvPicPr>
+        <p:blipFill>
+          <a:blip r:embed="rId4"/>
+          <a:srcRect l="0" r="0" t="0" b="0"/>
+          <a:stretch/>
+        </p:blipFill>
+        <p:spPr>
+          <a:xfrm>
+            <a:off x="4629150" y="2994279"/>
+            <a:ext cx="3874770" cy="1016653"/>
+          </a:xfrm>
+          <a:prstGeom prst="rect">
+            <a:avLst/>
+          </a:prstGeom>
+        </p:spPr>
+      </p:pic>
       <p:sp>
         <p:nvSpPr>
-          <p:cNvPr id="13" name="Shape 11"/>
-          <p:cNvSpPr/>
-          <p:nvPr/>
-        </p:nvSpPr>
-        <p:spPr>
-          <a:xfrm>
-            <a:off x="4629150" y="2994279"/>
-            <a:ext cx="3874770" cy="1016653"/>
-          </a:xfrm>
-          <a:prstGeom prst="rect">
-            <a:avLst/>
-          </a:prstGeom>
-          <a:solidFill>
-            <a:srgbClr val="FFFFFF"/>
-          </a:solidFill>
-          <a:ln w="19050">
-            <a:solidFill>
-              <a:srgbClr val="C47B2B"/>
-            </a:solidFill>
-            <a:prstDash val="dash"/>
-          </a:ln>
-        </p:spPr>
-      </p:sp>
-      <p:sp>
-        <p:nvSpPr>
-          <p:cNvPr id="14" name="Text 12"/>
-          <p:cNvSpPr/>
-          <p:nvPr/>
-        </p:nvSpPr>
-        <p:spPr>
-          <a:xfrm>
-            <a:off x="4766310" y="3319725"/>
-            <a:ext cx="3600450" cy="365760"/>
-          </a:xfrm>
-          <a:prstGeom prst="rect">
-            <a:avLst/>
-          </a:prstGeom>
-          <a:noFill/>
-          <a:ln/>
-        </p:spPr>
-        <p:txBody>
-          <a:bodyPr wrap="square" rtlCol="0" anchor="ctr"/>
-          <a:lstStyle/>
-          <a:p>
-            <a:pPr algn="ctr" indent="0" marL="0">
-              <a:buNone/>
-            </a:pPr>
-            <a:r>
-              <a:rPr lang="en-US" sz="1200" dirty="0">
-                <a:solidFill>
-                  <a:srgbClr val="777777"/>
-                </a:solidFill>
-                <a:latin typeface="Microsoft YaHei" pitchFamily="34" charset="0"/>
-                <a:ea typeface="Microsoft YaHei" pitchFamily="34" charset="-122"/>
-                <a:cs typeface="Microsoft YaHei" pitchFamily="34" charset="-120"/>
-              </a:rPr>
-              <a:t>素材缺失/路径未解析</a:t>
-            </a:r>
-            <a:endParaRPr lang="en-US" sz="1200" dirty="0"/>
-          </a:p>
-        </p:txBody>
-      </p:sp>
-      <p:sp>
-        <p:nvSpPr>
-          <p:cNvPr id="15" name="Text 13"/>
+          <p:cNvPr id="11" name="Text 5"/>
           <p:cNvSpPr/>
           <p:nvPr/>
         </p:nvSpPr>
@@ -1393,7 +1229,7 @@
       </p:sp>
       <p:sp>
         <p:nvSpPr>
-          <p:cNvPr id="16" name="Text 14"/>
+          <p:cNvPr id="12" name="Text 6"/>
           <p:cNvSpPr/>
           <p:nvPr/>
         </p:nvSpPr>

--- a/tests/benchmark/architectural_slides/case_024_renovation_journey/output.pptx
+++ b/tests/benchmark/architectural_slides/case_024_renovation_journey/output.pptx
@@ -910,7 +910,7 @@
         <p:spPr>
           <a:xfrm>
             <a:off x="640080" y="411480"/>
-            <a:ext cx="7863840" cy="601218"/>
+            <a:ext cx="7863840" cy="621792"/>
           </a:xfrm>
           <a:prstGeom prst="rect">
             <a:avLst/>
@@ -948,7 +948,7 @@
         </p:nvSpPr>
         <p:spPr>
           <a:xfrm>
-            <a:off x="640080" y="1050798"/>
+            <a:off x="640080" y="1071372"/>
             <a:ext cx="7863840" cy="411480"/>
           </a:xfrm>
           <a:prstGeom prst="rect">
@@ -994,8 +994,8 @@
         </p:blipFill>
         <p:spPr>
           <a:xfrm>
-            <a:off x="640080" y="1538478"/>
-            <a:ext cx="3874770" cy="1016653"/>
+            <a:off x="640080" y="1559052"/>
+            <a:ext cx="3874770" cy="1008629"/>
           </a:xfrm>
           <a:prstGeom prst="rect">
             <a:avLst/>
@@ -1010,8 +1010,8 @@
         </p:nvSpPr>
         <p:spPr>
           <a:xfrm>
-            <a:off x="640080" y="2593231"/>
-            <a:ext cx="3874770" cy="286748"/>
+            <a:off x="640080" y="2605781"/>
+            <a:ext cx="3874770" cy="284485"/>
           </a:xfrm>
           <a:prstGeom prst="rect">
             <a:avLst/>
@@ -1056,8 +1056,8 @@
         </p:blipFill>
         <p:spPr>
           <a:xfrm>
-            <a:off x="4629150" y="1538478"/>
-            <a:ext cx="3874770" cy="1016653"/>
+            <a:off x="4629150" y="1559052"/>
+            <a:ext cx="3874770" cy="1008629"/>
           </a:xfrm>
           <a:prstGeom prst="rect">
             <a:avLst/>
@@ -1072,8 +1072,8 @@
         </p:nvSpPr>
         <p:spPr>
           <a:xfrm>
-            <a:off x="4629150" y="2593231"/>
-            <a:ext cx="3874770" cy="286748"/>
+            <a:off x="4629150" y="2605781"/>
+            <a:ext cx="3874770" cy="284485"/>
           </a:xfrm>
           <a:prstGeom prst="rect">
             <a:avLst/>
@@ -1118,8 +1118,8 @@
         </p:blipFill>
         <p:spPr>
           <a:xfrm>
-            <a:off x="640080" y="2994279"/>
-            <a:ext cx="3874770" cy="1016653"/>
+            <a:off x="640080" y="3004566"/>
+            <a:ext cx="3874770" cy="1008629"/>
           </a:xfrm>
           <a:prstGeom prst="rect">
             <a:avLst/>
@@ -1134,8 +1134,8 @@
         </p:nvSpPr>
         <p:spPr>
           <a:xfrm>
-            <a:off x="640080" y="4049032"/>
-            <a:ext cx="3874770" cy="286748"/>
+            <a:off x="640080" y="4051295"/>
+            <a:ext cx="3874770" cy="284485"/>
           </a:xfrm>
           <a:prstGeom prst="rect">
             <a:avLst/>
@@ -1180,8 +1180,8 @@
         </p:blipFill>
         <p:spPr>
           <a:xfrm>
-            <a:off x="4629150" y="2994279"/>
-            <a:ext cx="3874770" cy="1016653"/>
+            <a:off x="4629150" y="3004566"/>
+            <a:ext cx="3874770" cy="1008629"/>
           </a:xfrm>
           <a:prstGeom prst="rect">
             <a:avLst/>
@@ -1196,8 +1196,8 @@
         </p:nvSpPr>
         <p:spPr>
           <a:xfrm>
-            <a:off x="4629150" y="4049032"/>
-            <a:ext cx="3874770" cy="286748"/>
+            <a:off x="4629150" y="4051295"/>
+            <a:ext cx="3874770" cy="284485"/>
           </a:xfrm>
           <a:prstGeom prst="rect">
             <a:avLst/>

--- a/tests/benchmark/architectural_slides/case_024_renovation_journey/output.pptx
+++ b/tests/benchmark/architectural_slides/case_024_renovation_journey/output.pptx
@@ -910,7 +910,7 @@
         <p:spPr>
           <a:xfrm>
             <a:off x="640080" y="411480"/>
-            <a:ext cx="7863840" cy="621792"/>
+            <a:ext cx="7863840" cy="601218"/>
           </a:xfrm>
           <a:prstGeom prst="rect">
             <a:avLst/>
@@ -948,7 +948,7 @@
         </p:nvSpPr>
         <p:spPr>
           <a:xfrm>
-            <a:off x="640080" y="1071372"/>
+            <a:off x="640080" y="1050798"/>
             <a:ext cx="7863840" cy="411480"/>
           </a:xfrm>
           <a:prstGeom prst="rect">
@@ -994,8 +994,8 @@
         </p:blipFill>
         <p:spPr>
           <a:xfrm>
-            <a:off x="640080" y="1559052"/>
-            <a:ext cx="3874770" cy="1008629"/>
+            <a:off x="640080" y="1538478"/>
+            <a:ext cx="3874770" cy="1016653"/>
           </a:xfrm>
           <a:prstGeom prst="rect">
             <a:avLst/>
@@ -1010,8 +1010,8 @@
         </p:nvSpPr>
         <p:spPr>
           <a:xfrm>
-            <a:off x="640080" y="2605781"/>
-            <a:ext cx="3874770" cy="284485"/>
+            <a:off x="640080" y="2593231"/>
+            <a:ext cx="3874770" cy="286748"/>
           </a:xfrm>
           <a:prstGeom prst="rect">
             <a:avLst/>
@@ -1056,8 +1056,8 @@
         </p:blipFill>
         <p:spPr>
           <a:xfrm>
-            <a:off x="4629150" y="1559052"/>
-            <a:ext cx="3874770" cy="1008629"/>
+            <a:off x="4629150" y="1538478"/>
+            <a:ext cx="3874770" cy="1016653"/>
           </a:xfrm>
           <a:prstGeom prst="rect">
             <a:avLst/>
@@ -1072,8 +1072,8 @@
         </p:nvSpPr>
         <p:spPr>
           <a:xfrm>
-            <a:off x="4629150" y="2605781"/>
-            <a:ext cx="3874770" cy="284485"/>
+            <a:off x="4629150" y="2593231"/>
+            <a:ext cx="3874770" cy="286748"/>
           </a:xfrm>
           <a:prstGeom prst="rect">
             <a:avLst/>
@@ -1118,8 +1118,8 @@
         </p:blipFill>
         <p:spPr>
           <a:xfrm>
-            <a:off x="640080" y="3004566"/>
-            <a:ext cx="3874770" cy="1008629"/>
+            <a:off x="640080" y="2994279"/>
+            <a:ext cx="3874770" cy="1016653"/>
           </a:xfrm>
           <a:prstGeom prst="rect">
             <a:avLst/>
@@ -1134,8 +1134,8 @@
         </p:nvSpPr>
         <p:spPr>
           <a:xfrm>
-            <a:off x="640080" y="4051295"/>
-            <a:ext cx="3874770" cy="284485"/>
+            <a:off x="640080" y="4049032"/>
+            <a:ext cx="3874770" cy="286748"/>
           </a:xfrm>
           <a:prstGeom prst="rect">
             <a:avLst/>
@@ -1180,8 +1180,8 @@
         </p:blipFill>
         <p:spPr>
           <a:xfrm>
-            <a:off x="4629150" y="3004566"/>
-            <a:ext cx="3874770" cy="1008629"/>
+            <a:off x="4629150" y="2994279"/>
+            <a:ext cx="3874770" cy="1016653"/>
           </a:xfrm>
           <a:prstGeom prst="rect">
             <a:avLst/>
@@ -1196,8 +1196,8 @@
         </p:nvSpPr>
         <p:spPr>
           <a:xfrm>
-            <a:off x="4629150" y="4051295"/>
-            <a:ext cx="3874770" cy="284485"/>
+            <a:off x="4629150" y="4049032"/>
+            <a:ext cx="3874770" cy="286748"/>
           </a:xfrm>
           <a:prstGeom prst="rect">
             <a:avLst/>

--- a/tests/benchmark/architectural_slides/case_024_renovation_journey/output.pptx
+++ b/tests/benchmark/architectural_slides/case_024_renovation_journey/output.pptx
@@ -940,16 +940,202 @@
           </a:p>
         </p:txBody>
       </p:sp>
+      <p:pic>
+        <p:nvPicPr>
+          <p:cNvPr id="3" name="Image 0" descr="C:\Users\navib\Desktop\development\Archium-Agent\tests\benchmark\architectural_slides\case_024_renovation_journey\assets\c0240001-0001-4001-8001-000000000001.png">    </p:cNvPr>
+          <p:cNvPicPr>
+            <a:picLocks noChangeAspect="1"/>
+          </p:cNvPicPr>
+          <p:nvPr/>
+        </p:nvPicPr>
+        <p:blipFill>
+          <a:blip r:embed="rId1"/>
+          <a:srcRect l="0" r="0" t="0" b="0"/>
+          <a:stretch/>
+        </p:blipFill>
+        <p:spPr>
+          <a:xfrm>
+            <a:off x="640080" y="1088898"/>
+            <a:ext cx="4804715" cy="2303160"/>
+          </a:xfrm>
+          <a:prstGeom prst="rect">
+            <a:avLst/>
+          </a:prstGeom>
+        </p:spPr>
+      </p:pic>
       <p:sp>
         <p:nvSpPr>
-          <p:cNvPr id="3" name="Text 1"/>
+          <p:cNvPr id="4" name="Text 1"/>
           <p:cNvSpPr/>
           <p:nvPr/>
         </p:nvSpPr>
         <p:spPr>
           <a:xfrm>
-            <a:off x="640080" y="1050798"/>
-            <a:ext cx="7863840" cy="411480"/>
+            <a:off x="640080" y="3430158"/>
+            <a:ext cx="4804715" cy="505572"/>
+          </a:xfrm>
+          <a:prstGeom prst="rect">
+            <a:avLst/>
+          </a:prstGeom>
+          <a:noFill/>
+          <a:ln/>
+        </p:spPr>
+        <p:txBody>
+          <a:bodyPr wrap="square" rtlCol="0" anchor="t"/>
+          <a:lstStyle/>
+          <a:p>
+            <a:pPr algn="l" indent="0" marL="0">
+              <a:buNone/>
+            </a:pPr>
+            <a:r>
+              <a:rPr lang="en-US" sz="1200" dirty="0">
+                <a:solidFill>
+                  <a:srgbClr val="777777"/>
+                </a:solidFill>
+                <a:latin typeface="Microsoft YaHei" pitchFamily="34" charset="0"/>
+                <a:ea typeface="Microsoft YaHei" pitchFamily="34" charset="-122"/>
+                <a:cs typeface="Microsoft YaHei" pitchFamily="34" charset="-120"/>
+              </a:rPr>
+              <a:t>1. 现状封闭</a:t>
+            </a:r>
+            <a:endParaRPr lang="en-US" sz="1200" dirty="0"/>
+          </a:p>
+        </p:txBody>
+      </p:sp>
+      <p:pic>
+        <p:nvPicPr>
+          <p:cNvPr id="5" name="Image 1" descr="C:\Users\navib\Desktop\development\Archium-Agent\tests\benchmark\architectural_slides\case_024_renovation_journey\assets\c0240002-0001-4001-8001-000000000002.png">    </p:cNvPr>
+          <p:cNvPicPr>
+            <a:picLocks noChangeAspect="1"/>
+          </p:cNvPicPr>
+          <p:nvPr/>
+        </p:nvPicPr>
+        <p:blipFill>
+          <a:blip r:embed="rId2"/>
+          <a:srcRect l="0" r="0" t="0" b="0"/>
+          <a:stretch/>
+        </p:blipFill>
+        <p:spPr>
+          <a:xfrm>
+            <a:off x="5559095" y="1088898"/>
+            <a:ext cx="2944825" cy="1089096"/>
+          </a:xfrm>
+          <a:prstGeom prst="rect">
+            <a:avLst/>
+          </a:prstGeom>
+        </p:spPr>
+      </p:pic>
+      <p:sp>
+        <p:nvSpPr>
+          <p:cNvPr id="6" name="Text 2"/>
+          <p:cNvSpPr/>
+          <p:nvPr/>
+        </p:nvSpPr>
+        <p:spPr>
+          <a:xfrm>
+            <a:off x="5559095" y="2216094"/>
+            <a:ext cx="2944825" cy="239070"/>
+          </a:xfrm>
+          <a:prstGeom prst="rect">
+            <a:avLst/>
+          </a:prstGeom>
+          <a:noFill/>
+          <a:ln/>
+        </p:spPr>
+        <p:txBody>
+          <a:bodyPr wrap="square" rtlCol="0" anchor="t"/>
+          <a:lstStyle/>
+          <a:p>
+            <a:pPr algn="l" indent="0" marL="0">
+              <a:buNone/>
+            </a:pPr>
+            <a:r>
+              <a:rPr lang="en-US" sz="1200" dirty="0">
+                <a:solidFill>
+                  <a:srgbClr val="777777"/>
+                </a:solidFill>
+                <a:latin typeface="Microsoft YaHei" pitchFamily="34" charset="0"/>
+                <a:ea typeface="Microsoft YaHei" pitchFamily="34" charset="-122"/>
+                <a:cs typeface="Microsoft YaHei" pitchFamily="34" charset="-120"/>
+              </a:rPr>
+              <a:t>2. 一期开放</a:t>
+            </a:r>
+            <a:endParaRPr lang="en-US" sz="1200" dirty="0"/>
+          </a:p>
+        </p:txBody>
+      </p:sp>
+      <p:pic>
+        <p:nvPicPr>
+          <p:cNvPr id="7" name="Image 2" descr="C:\Users\navib\Desktop\development\Archium-Agent\tests\benchmark\architectural_slides\case_024_renovation_journey\assets\c0240003-0001-4001-8001-000000000003.png">    </p:cNvPr>
+          <p:cNvPicPr>
+            <a:picLocks noChangeAspect="1"/>
+          </p:cNvPicPr>
+          <p:nvPr/>
+        </p:nvPicPr>
+        <p:blipFill>
+          <a:blip r:embed="rId3"/>
+          <a:srcRect l="0" r="0" t="0" b="0"/>
+          <a:stretch/>
+        </p:blipFill>
+        <p:spPr>
+          <a:xfrm>
+            <a:off x="5559095" y="2569464"/>
+            <a:ext cx="2944825" cy="1089096"/>
+          </a:xfrm>
+          <a:prstGeom prst="rect">
+            <a:avLst/>
+          </a:prstGeom>
+        </p:spPr>
+      </p:pic>
+      <p:sp>
+        <p:nvSpPr>
+          <p:cNvPr id="8" name="Text 3"/>
+          <p:cNvSpPr/>
+          <p:nvPr/>
+        </p:nvSpPr>
+        <p:spPr>
+          <a:xfrm>
+            <a:off x="5559095" y="3696660"/>
+            <a:ext cx="2944825" cy="239070"/>
+          </a:xfrm>
+          <a:prstGeom prst="rect">
+            <a:avLst/>
+          </a:prstGeom>
+          <a:noFill/>
+          <a:ln/>
+        </p:spPr>
+        <p:txBody>
+          <a:bodyPr wrap="square" rtlCol="0" anchor="t"/>
+          <a:lstStyle/>
+          <a:p>
+            <a:pPr algn="l" indent="0" marL="0">
+              <a:buNone/>
+            </a:pPr>
+            <a:r>
+              <a:rPr lang="en-US" sz="1200" dirty="0">
+                <a:solidFill>
+                  <a:srgbClr val="777777"/>
+                </a:solidFill>
+                <a:latin typeface="Microsoft YaHei" pitchFamily="34" charset="0"/>
+                <a:ea typeface="Microsoft YaHei" pitchFamily="34" charset="-122"/>
+                <a:cs typeface="Microsoft YaHei" pitchFamily="34" charset="-120"/>
+              </a:rPr>
+              <a:t>3. 二期整合</a:t>
+            </a:r>
+            <a:endParaRPr lang="en-US" sz="1200" dirty="0"/>
+          </a:p>
+        </p:txBody>
+      </p:sp>
+      <p:sp>
+        <p:nvSpPr>
+          <p:cNvPr id="9" name="Text 4"/>
+          <p:cNvSpPr/>
+          <p:nvPr/>
+        </p:nvSpPr>
+        <p:spPr>
+          <a:xfrm>
+            <a:off x="640080" y="4011930"/>
+            <a:ext cx="7863840" cy="400050"/>
           </a:xfrm>
           <a:prstGeom prst="rect">
             <a:avLst/>
@@ -979,257 +1165,9 @@
           </a:p>
         </p:txBody>
       </p:sp>
-      <p:pic>
-        <p:nvPicPr>
-          <p:cNvPr id="4" name="Image 0" descr="C:\Users\navib\Desktop\development\Archium-Agent\tests\benchmark\architectural_slides\case_024_renovation_journey\assets\c0240001-0001-4001-8001-000000000001.png">    </p:cNvPr>
-          <p:cNvPicPr>
-            <a:picLocks noChangeAspect="1"/>
-          </p:cNvPicPr>
-          <p:nvPr/>
-        </p:nvPicPr>
-        <p:blipFill>
-          <a:blip r:embed="rId1"/>
-          <a:srcRect l="0" r="0" t="0" b="0"/>
-          <a:stretch/>
-        </p:blipFill>
-        <p:spPr>
-          <a:xfrm>
-            <a:off x="640080" y="1538478"/>
-            <a:ext cx="3874770" cy="1016653"/>
-          </a:xfrm>
-          <a:prstGeom prst="rect">
-            <a:avLst/>
-          </a:prstGeom>
-        </p:spPr>
-      </p:pic>
       <p:sp>
         <p:nvSpPr>
-          <p:cNvPr id="5" name="Text 2"/>
-          <p:cNvSpPr/>
-          <p:nvPr/>
-        </p:nvSpPr>
-        <p:spPr>
-          <a:xfrm>
-            <a:off x="640080" y="2593231"/>
-            <a:ext cx="3874770" cy="286748"/>
-          </a:xfrm>
-          <a:prstGeom prst="rect">
-            <a:avLst/>
-          </a:prstGeom>
-          <a:noFill/>
-          <a:ln/>
-        </p:spPr>
-        <p:txBody>
-          <a:bodyPr wrap="square" rtlCol="0" anchor="t"/>
-          <a:lstStyle/>
-          <a:p>
-            <a:pPr algn="l" indent="0" marL="0">
-              <a:buNone/>
-            </a:pPr>
-            <a:r>
-              <a:rPr lang="en-US" sz="1200" dirty="0">
-                <a:solidFill>
-                  <a:srgbClr val="777777"/>
-                </a:solidFill>
-                <a:latin typeface="Microsoft YaHei" pitchFamily="34" charset="0"/>
-                <a:ea typeface="Microsoft YaHei" pitchFamily="34" charset="-122"/>
-                <a:cs typeface="Microsoft YaHei" pitchFamily="34" charset="-120"/>
-              </a:rPr>
-              <a:t>1. 现状封闭</a:t>
-            </a:r>
-            <a:endParaRPr lang="en-US" sz="1200" dirty="0"/>
-          </a:p>
-        </p:txBody>
-      </p:sp>
-      <p:pic>
-        <p:nvPicPr>
-          <p:cNvPr id="6" name="Image 1" descr="C:\Users\navib\Desktop\development\Archium-Agent\tests\benchmark\architectural_slides\case_024_renovation_journey\assets\c0240002-0001-4001-8001-000000000002.png">    </p:cNvPr>
-          <p:cNvPicPr>
-            <a:picLocks noChangeAspect="1"/>
-          </p:cNvPicPr>
-          <p:nvPr/>
-        </p:nvPicPr>
-        <p:blipFill>
-          <a:blip r:embed="rId2"/>
-          <a:srcRect l="0" r="0" t="0" b="0"/>
-          <a:stretch/>
-        </p:blipFill>
-        <p:spPr>
-          <a:xfrm>
-            <a:off x="4629150" y="1538478"/>
-            <a:ext cx="3874770" cy="1016653"/>
-          </a:xfrm>
-          <a:prstGeom prst="rect">
-            <a:avLst/>
-          </a:prstGeom>
-        </p:spPr>
-      </p:pic>
-      <p:sp>
-        <p:nvSpPr>
-          <p:cNvPr id="7" name="Text 3"/>
-          <p:cNvSpPr/>
-          <p:nvPr/>
-        </p:nvSpPr>
-        <p:spPr>
-          <a:xfrm>
-            <a:off x="4629150" y="2593231"/>
-            <a:ext cx="3874770" cy="286748"/>
-          </a:xfrm>
-          <a:prstGeom prst="rect">
-            <a:avLst/>
-          </a:prstGeom>
-          <a:noFill/>
-          <a:ln/>
-        </p:spPr>
-        <p:txBody>
-          <a:bodyPr wrap="square" rtlCol="0" anchor="t"/>
-          <a:lstStyle/>
-          <a:p>
-            <a:pPr algn="l" indent="0" marL="0">
-              <a:buNone/>
-            </a:pPr>
-            <a:r>
-              <a:rPr lang="en-US" sz="1200" dirty="0">
-                <a:solidFill>
-                  <a:srgbClr val="777777"/>
-                </a:solidFill>
-                <a:latin typeface="Microsoft YaHei" pitchFamily="34" charset="0"/>
-                <a:ea typeface="Microsoft YaHei" pitchFamily="34" charset="-122"/>
-                <a:cs typeface="Microsoft YaHei" pitchFamily="34" charset="-120"/>
-              </a:rPr>
-              <a:t>2. 一期开放</a:t>
-            </a:r>
-            <a:endParaRPr lang="en-US" sz="1200" dirty="0"/>
-          </a:p>
-        </p:txBody>
-      </p:sp>
-      <p:pic>
-        <p:nvPicPr>
-          <p:cNvPr id="8" name="Image 2" descr="C:\Users\navib\Desktop\development\Archium-Agent\tests\benchmark\architectural_slides\case_024_renovation_journey\assets\c0240003-0001-4001-8001-000000000003.png">    </p:cNvPr>
-          <p:cNvPicPr>
-            <a:picLocks noChangeAspect="1"/>
-          </p:cNvPicPr>
-          <p:nvPr/>
-        </p:nvPicPr>
-        <p:blipFill>
-          <a:blip r:embed="rId3"/>
-          <a:srcRect l="0" r="0" t="0" b="0"/>
-          <a:stretch/>
-        </p:blipFill>
-        <p:spPr>
-          <a:xfrm>
-            <a:off x="640080" y="2994279"/>
-            <a:ext cx="3874770" cy="1016653"/>
-          </a:xfrm>
-          <a:prstGeom prst="rect">
-            <a:avLst/>
-          </a:prstGeom>
-        </p:spPr>
-      </p:pic>
-      <p:sp>
-        <p:nvSpPr>
-          <p:cNvPr id="9" name="Text 4"/>
-          <p:cNvSpPr/>
-          <p:nvPr/>
-        </p:nvSpPr>
-        <p:spPr>
-          <a:xfrm>
-            <a:off x="640080" y="4049032"/>
-            <a:ext cx="3874770" cy="286748"/>
-          </a:xfrm>
-          <a:prstGeom prst="rect">
-            <a:avLst/>
-          </a:prstGeom>
-          <a:noFill/>
-          <a:ln/>
-        </p:spPr>
-        <p:txBody>
-          <a:bodyPr wrap="square" rtlCol="0" anchor="t"/>
-          <a:lstStyle/>
-          <a:p>
-            <a:pPr algn="l" indent="0" marL="0">
-              <a:buNone/>
-            </a:pPr>
-            <a:r>
-              <a:rPr lang="en-US" sz="1200" dirty="0">
-                <a:solidFill>
-                  <a:srgbClr val="777777"/>
-                </a:solidFill>
-                <a:latin typeface="Microsoft YaHei" pitchFamily="34" charset="0"/>
-                <a:ea typeface="Microsoft YaHei" pitchFamily="34" charset="-122"/>
-                <a:cs typeface="Microsoft YaHei" pitchFamily="34" charset="-120"/>
-              </a:rPr>
-              <a:t>3. 二期整合</a:t>
-            </a:r>
-            <a:endParaRPr lang="en-US" sz="1200" dirty="0"/>
-          </a:p>
-        </p:txBody>
-      </p:sp>
-      <p:pic>
-        <p:nvPicPr>
-          <p:cNvPr id="10" name="Image 3" descr="C:\Users\navib\Desktop\development\Archium-Agent\tests\benchmark\architectural_slides\case_024_renovation_journey\assets\c0240004-0001-4001-8001-000000000004.png">    </p:cNvPr>
-          <p:cNvPicPr>
-            <a:picLocks noChangeAspect="1"/>
-          </p:cNvPicPr>
-          <p:nvPr/>
-        </p:nvPicPr>
-        <p:blipFill>
-          <a:blip r:embed="rId4"/>
-          <a:srcRect l="0" r="0" t="0" b="0"/>
-          <a:stretch/>
-        </p:blipFill>
-        <p:spPr>
-          <a:xfrm>
-            <a:off x="4629150" y="2994279"/>
-            <a:ext cx="3874770" cy="1016653"/>
-          </a:xfrm>
-          <a:prstGeom prst="rect">
-            <a:avLst/>
-          </a:prstGeom>
-        </p:spPr>
-      </p:pic>
-      <p:sp>
-        <p:nvSpPr>
-          <p:cNvPr id="11" name="Text 5"/>
-          <p:cNvSpPr/>
-          <p:nvPr/>
-        </p:nvSpPr>
-        <p:spPr>
-          <a:xfrm>
-            <a:off x="4629150" y="4049032"/>
-            <a:ext cx="3874770" cy="286748"/>
-          </a:xfrm>
-          <a:prstGeom prst="rect">
-            <a:avLst/>
-          </a:prstGeom>
-          <a:noFill/>
-          <a:ln/>
-        </p:spPr>
-        <p:txBody>
-          <a:bodyPr wrap="square" rtlCol="0" anchor="t"/>
-          <a:lstStyle/>
-          <a:p>
-            <a:pPr algn="l" indent="0" marL="0">
-              <a:buNone/>
-            </a:pPr>
-            <a:r>
-              <a:rPr lang="en-US" sz="1200" dirty="0">
-                <a:solidFill>
-                  <a:srgbClr val="777777"/>
-                </a:solidFill>
-                <a:latin typeface="Microsoft YaHei" pitchFamily="34" charset="0"/>
-                <a:ea typeface="Microsoft YaHei" pitchFamily="34" charset="-122"/>
-                <a:cs typeface="Microsoft YaHei" pitchFamily="34" charset="-120"/>
-              </a:rPr>
-              <a:t>4. 内院完成</a:t>
-            </a:r>
-            <a:endParaRPr lang="en-US" sz="1200" dirty="0"/>
-          </a:p>
-        </p:txBody>
-      </p:sp>
-      <p:sp>
-        <p:nvSpPr>
-          <p:cNvPr id="12" name="Text 6"/>
+          <p:cNvPr id="10" name="Text 5"/>
           <p:cNvSpPr/>
           <p:nvPr/>
         </p:nvSpPr>

--- a/tests/benchmark/architectural_slides/case_024_renovation_journey/output.pptx
+++ b/tests/benchmark/architectural_slides/case_024_renovation_journey/output.pptx
@@ -996,7 +996,7 @@
                 <a:ea typeface="Microsoft YaHei" pitchFamily="34" charset="-122"/>
                 <a:cs typeface="Microsoft YaHei" pitchFamily="34" charset="-120"/>
               </a:rPr>
-              <a:t>1. 现状封闭</a:t>
+              <a:t>1. 改造前：院区界面封闭，公共性不足</a:t>
             </a:r>
             <a:endParaRPr lang="en-US" sz="1200" dirty="0"/>
           </a:p>
@@ -1058,7 +1058,7 @@
                 <a:ea typeface="Microsoft YaHei" pitchFamily="34" charset="-122"/>
                 <a:cs typeface="Microsoft YaHei" pitchFamily="34" charset="-120"/>
               </a:rPr>
-              <a:t>2. 一期开放</a:t>
+              <a:t>2. 一期：南侧内院开放，形成公共活动面</a:t>
             </a:r>
             <a:endParaRPr lang="en-US" sz="1200" dirty="0"/>
           </a:p>
@@ -1120,7 +1120,7 @@
                 <a:ea typeface="Microsoft YaHei" pitchFamily="34" charset="-122"/>
                 <a:cs typeface="Microsoft YaHei" pitchFamily="34" charset="-120"/>
               </a:rPr>
-              <a:t>3. 二期整合</a:t>
+              <a:t>3. 二期：医疗与科研体量整合，流线重组</a:t>
             </a:r>
             <a:endParaRPr lang="en-US" sz="1200" dirty="0"/>
           </a:p>
